--- a/Main/Study/First Sem/All Notes and Resources Combined/AOS Notes/Unit 3.1-Chapter 6 (System Protection).pptx
+++ b/Main/Study/First Sem/All Notes and Resources Combined/AOS Notes/Unit 3.1-Chapter 6 (System Protection).pptx
@@ -211,6 +211,45 @@
     </pc:docChg>
   </pc:docChgLst>
   <pc:docChgLst>
+    <pc:chgData name="Yujan Basnet" userId="495fd8277ebfbaef" providerId="LiveId" clId="{C48A5302-ED37-41B1-8197-8352DBE64824}"/>
+    <pc:docChg chg="modSld">
+      <pc:chgData name="Yujan Basnet" userId="495fd8277ebfbaef" providerId="LiveId" clId="{C48A5302-ED37-41B1-8197-8352DBE64824}" dt="2025-06-19T11:29:14.052" v="2" actId="207"/>
+      <pc:docMkLst>
+        <pc:docMk/>
+      </pc:docMkLst>
+      <pc:sldChg chg="modSp mod">
+        <pc:chgData name="Yujan Basnet" userId="495fd8277ebfbaef" providerId="LiveId" clId="{C48A5302-ED37-41B1-8197-8352DBE64824}" dt="2025-06-19T10:43:12.246" v="0" actId="207"/>
+        <pc:sldMkLst>
+          <pc:docMk/>
+          <pc:sldMk cId="0" sldId="258"/>
+        </pc:sldMkLst>
+        <pc:spChg chg="mod">
+          <ac:chgData name="Yujan Basnet" userId="495fd8277ebfbaef" providerId="LiveId" clId="{C48A5302-ED37-41B1-8197-8352DBE64824}" dt="2025-06-19T10:43:12.246" v="0" actId="207"/>
+          <ac:spMkLst>
+            <pc:docMk/>
+            <pc:sldMk cId="0" sldId="258"/>
+            <ac:spMk id="3" creationId="{00000000-0000-0000-0000-000000000000}"/>
+          </ac:spMkLst>
+        </pc:spChg>
+      </pc:sldChg>
+      <pc:sldChg chg="modSp mod">
+        <pc:chgData name="Yujan Basnet" userId="495fd8277ebfbaef" providerId="LiveId" clId="{C48A5302-ED37-41B1-8197-8352DBE64824}" dt="2025-06-19T11:29:14.052" v="2" actId="207"/>
+        <pc:sldMkLst>
+          <pc:docMk/>
+          <pc:sldMk cId="0" sldId="274"/>
+        </pc:sldMkLst>
+        <pc:spChg chg="mod">
+          <ac:chgData name="Yujan Basnet" userId="495fd8277ebfbaef" providerId="LiveId" clId="{C48A5302-ED37-41B1-8197-8352DBE64824}" dt="2025-06-19T11:29:14.052" v="2" actId="207"/>
+          <ac:spMkLst>
+            <pc:docMk/>
+            <pc:sldMk cId="0" sldId="274"/>
+            <ac:spMk id="3" creationId="{00000000-0000-0000-0000-000000000000}"/>
+          </ac:spMkLst>
+        </pc:spChg>
+      </pc:sldChg>
+    </pc:docChg>
+  </pc:docChgLst>
+  <pc:docChgLst>
     <pc:chgData name="Binod Kumar Adhikari" userId="256f5a90-d823-4e8d-9a41-a3da19f4a0ad" providerId="ADAL" clId="{3CF3BE64-4DBF-433C-BA17-6C32BA5DC329}"/>
     <pc:docChg chg="modSld">
       <pc:chgData name="Binod Kumar Adhikari" userId="256f5a90-d823-4e8d-9a41-a3da19f4a0ad" providerId="ADAL" clId="{3CF3BE64-4DBF-433C-BA17-6C32BA5DC329}" dt="2025-04-24T05:49:58.277" v="0" actId="114"/>
@@ -233,9 +272,6 @@
         </pc:spChg>
       </pc:sldChg>
     </pc:docChg>
-  </pc:docChgLst>
-  <pc:docChgLst>
-    <pc:chgData name="Binod Kumar Adhikari" userId="256f5a90-d823-4e8d-9a41-a3da19f4a0ad" providerId="ADAL" clId="{1E41A637-EF6A-427C-82DF-F204A75F903D}"/>
   </pc:docChgLst>
 </pc:chgInfo>
 </file>
@@ -322,7 +358,7 @@
           <a:p>
             <a:fld id="{4012DB17-8D13-4501-BA56-2B9A68AD64D3}" type="datetimeFigureOut">
               <a:rPr lang="en-IN" smtClean="0"/>
-              <a:t>24-04-2025</a:t>
+              <a:t>19-06-2025</a:t>
             </a:fld>
             <a:endParaRPr lang="en-IN"/>
           </a:p>
@@ -6103,7 +6139,7 @@
               </a:rPr>
               <a:t>to.</a:t>
             </a:r>
-            <a:endParaRPr sz="3200">
+            <a:endParaRPr sz="3200" dirty="0">
               <a:latin typeface="Calibri"/>
               <a:cs typeface="Calibri"/>
             </a:endParaRPr>
@@ -6199,7 +6235,7 @@
               </a:rPr>
               <a:t>networks</a:t>
             </a:r>
-            <a:endParaRPr sz="3200">
+            <a:endParaRPr sz="3200" dirty="0">
               <a:latin typeface="Calibri"/>
               <a:cs typeface="Calibri"/>
             </a:endParaRPr>
@@ -6442,7 +6478,7 @@
               </a:rPr>
               <a:t>resource.</a:t>
             </a:r>
-            <a:endParaRPr sz="3200">
+            <a:endParaRPr sz="3200" dirty="0">
               <a:latin typeface="Calibri"/>
               <a:cs typeface="Calibri"/>
             </a:endParaRPr>
@@ -11516,7 +11552,7 @@
         <p:spPr>
           <a:xfrm>
             <a:off x="535940" y="1507044"/>
-            <a:ext cx="7980680" cy="4287520"/>
+            <a:ext cx="7980680" cy="4754506"/>
           </a:xfrm>
           <a:prstGeom prst="rect">
             <a:avLst/>
@@ -11624,83 +11660,119 @@
               <a:t> </a:t>
             </a:r>
             <a:r>
-              <a:rPr sz="2800" dirty="0">
+              <a:rPr sz="2800" b="1" dirty="0">
+                <a:solidFill>
+                  <a:srgbClr val="00B050"/>
+                </a:solidFill>
                 <a:latin typeface="Calibri"/>
                 <a:cs typeface="Calibri"/>
               </a:rPr>
               <a:t>is</a:t>
             </a:r>
             <a:r>
-              <a:rPr sz="2800" spc="-65" dirty="0">
-                <a:latin typeface="Calibri"/>
-                <a:cs typeface="Calibri"/>
-              </a:rPr>
-              <a:t> </a:t>
-            </a:r>
-            <a:r>
-              <a:rPr sz="2800" dirty="0">
+              <a:rPr sz="2800" b="1" spc="-65" dirty="0">
+                <a:solidFill>
+                  <a:srgbClr val="00B050"/>
+                </a:solidFill>
+                <a:latin typeface="Calibri"/>
+                <a:cs typeface="Calibri"/>
+              </a:rPr>
+              <a:t> </a:t>
+            </a:r>
+            <a:r>
+              <a:rPr sz="2800" b="1" dirty="0">
+                <a:solidFill>
+                  <a:srgbClr val="00B050"/>
+                </a:solidFill>
                 <a:latin typeface="Calibri"/>
                 <a:cs typeface="Calibri"/>
               </a:rPr>
               <a:t>one</a:t>
             </a:r>
             <a:r>
-              <a:rPr sz="2800" spc="-65" dirty="0">
-                <a:latin typeface="Calibri"/>
-                <a:cs typeface="Calibri"/>
-              </a:rPr>
-              <a:t> </a:t>
-            </a:r>
-            <a:r>
-              <a:rPr sz="2800" dirty="0">
+              <a:rPr sz="2800" b="1" spc="-65" dirty="0">
+                <a:solidFill>
+                  <a:srgbClr val="00B050"/>
+                </a:solidFill>
+                <a:latin typeface="Calibri"/>
+                <a:cs typeface="Calibri"/>
+              </a:rPr>
+              <a:t> </a:t>
+            </a:r>
+            <a:r>
+              <a:rPr sz="2800" b="1" dirty="0">
+                <a:solidFill>
+                  <a:srgbClr val="00B050"/>
+                </a:solidFill>
                 <a:latin typeface="Calibri"/>
                 <a:cs typeface="Calibri"/>
               </a:rPr>
               <a:t>big</a:t>
             </a:r>
             <a:r>
-              <a:rPr sz="2800" spc="-50" dirty="0">
-                <a:latin typeface="Calibri"/>
-                <a:cs typeface="Calibri"/>
-              </a:rPr>
-              <a:t> </a:t>
-            </a:r>
-            <a:r>
-              <a:rPr sz="2800" dirty="0">
+              <a:rPr sz="2800" b="1" spc="-50" dirty="0">
+                <a:solidFill>
+                  <a:srgbClr val="00B050"/>
+                </a:solidFill>
+                <a:latin typeface="Calibri"/>
+                <a:cs typeface="Calibri"/>
+              </a:rPr>
+              <a:t> </a:t>
+            </a:r>
+            <a:r>
+              <a:rPr sz="2800" b="1" dirty="0">
+                <a:solidFill>
+                  <a:srgbClr val="00B050"/>
+                </a:solidFill>
                 <a:latin typeface="Calibri"/>
                 <a:cs typeface="Calibri"/>
               </a:rPr>
               <a:t>global</a:t>
             </a:r>
             <a:r>
-              <a:rPr sz="2800" spc="-60" dirty="0">
-                <a:latin typeface="Calibri"/>
-                <a:cs typeface="Calibri"/>
-              </a:rPr>
-              <a:t> </a:t>
-            </a:r>
-            <a:r>
-              <a:rPr sz="2800" dirty="0">
+              <a:rPr sz="2800" b="1" spc="-60" dirty="0">
+                <a:solidFill>
+                  <a:srgbClr val="00B050"/>
+                </a:solidFill>
+                <a:latin typeface="Calibri"/>
+                <a:cs typeface="Calibri"/>
+              </a:rPr>
+              <a:t> </a:t>
+            </a:r>
+            <a:r>
+              <a:rPr sz="2800" b="1" dirty="0">
+                <a:solidFill>
+                  <a:srgbClr val="00B050"/>
+                </a:solidFill>
                 <a:latin typeface="Calibri"/>
                 <a:cs typeface="Calibri"/>
               </a:rPr>
               <a:t>table</a:t>
             </a:r>
             <a:r>
-              <a:rPr sz="2800" spc="-65" dirty="0">
-                <a:latin typeface="Calibri"/>
-                <a:cs typeface="Calibri"/>
-              </a:rPr>
-              <a:t> </a:t>
-            </a:r>
-            <a:r>
-              <a:rPr sz="2800" spc="-20" dirty="0">
+              <a:rPr sz="2800" b="1" spc="-65" dirty="0">
+                <a:solidFill>
+                  <a:srgbClr val="00B050"/>
+                </a:solidFill>
+                <a:latin typeface="Calibri"/>
+                <a:cs typeface="Calibri"/>
+              </a:rPr>
+              <a:t> </a:t>
+            </a:r>
+            <a:r>
+              <a:rPr sz="2800" b="1" spc="-20" dirty="0">
+                <a:solidFill>
+                  <a:srgbClr val="00B050"/>
+                </a:solidFill>
                 <a:latin typeface="Calibri"/>
                 <a:cs typeface="Calibri"/>
               </a:rPr>
               <a:t>with</a:t>
             </a:r>
-            <a:endParaRPr sz="2800" dirty="0">
+            <a:endParaRPr sz="2800" b="1" dirty="0">
+              <a:solidFill>
+                <a:srgbClr val="00B050"/>
+              </a:solidFill>
               <a:latin typeface="Calibri"/>
               <a:cs typeface="Calibri"/>
             </a:endParaRPr>
@@ -11712,83 +11784,119 @@
               </a:lnSpc>
             </a:pPr>
             <a:r>
-              <a:rPr sz="2800" dirty="0">
+              <a:rPr sz="2800" b="1" dirty="0">
+                <a:solidFill>
+                  <a:srgbClr val="00B050"/>
+                </a:solidFill>
                 <a:latin typeface="Calibri"/>
                 <a:cs typeface="Calibri"/>
               </a:rPr>
               <a:t>&lt;</a:t>
             </a:r>
             <a:r>
-              <a:rPr sz="2800" spc="-65" dirty="0">
-                <a:latin typeface="Calibri"/>
-                <a:cs typeface="Calibri"/>
-              </a:rPr>
-              <a:t> </a:t>
-            </a:r>
-            <a:r>
-              <a:rPr sz="2800" dirty="0">
+              <a:rPr sz="2800" b="1" spc="-65" dirty="0">
+                <a:solidFill>
+                  <a:srgbClr val="00B050"/>
+                </a:solidFill>
+                <a:latin typeface="Calibri"/>
+                <a:cs typeface="Calibri"/>
+              </a:rPr>
+              <a:t> </a:t>
+            </a:r>
+            <a:r>
+              <a:rPr sz="2800" b="1" dirty="0">
+                <a:solidFill>
+                  <a:srgbClr val="00B050"/>
+                </a:solidFill>
                 <a:latin typeface="Calibri"/>
                 <a:cs typeface="Calibri"/>
               </a:rPr>
               <a:t>domain,</a:t>
             </a:r>
             <a:r>
-              <a:rPr sz="2800" spc="-45" dirty="0">
-                <a:latin typeface="Calibri"/>
-                <a:cs typeface="Calibri"/>
-              </a:rPr>
-              <a:t> </a:t>
-            </a:r>
-            <a:r>
-              <a:rPr sz="2800" dirty="0">
+              <a:rPr sz="2800" b="1" spc="-45" dirty="0">
+                <a:solidFill>
+                  <a:srgbClr val="00B050"/>
+                </a:solidFill>
+                <a:latin typeface="Calibri"/>
+                <a:cs typeface="Calibri"/>
+              </a:rPr>
+              <a:t> </a:t>
+            </a:r>
+            <a:r>
+              <a:rPr sz="2800" b="1" dirty="0">
+                <a:solidFill>
+                  <a:srgbClr val="00B050"/>
+                </a:solidFill>
                 <a:latin typeface="Calibri"/>
                 <a:cs typeface="Calibri"/>
               </a:rPr>
               <a:t>object,</a:t>
             </a:r>
             <a:r>
-              <a:rPr sz="2800" spc="-45" dirty="0">
-                <a:latin typeface="Calibri"/>
-                <a:cs typeface="Calibri"/>
-              </a:rPr>
-              <a:t> </a:t>
-            </a:r>
-            <a:r>
-              <a:rPr sz="2800" dirty="0">
+              <a:rPr sz="2800" b="1" spc="-45" dirty="0">
+                <a:solidFill>
+                  <a:srgbClr val="00B050"/>
+                </a:solidFill>
+                <a:latin typeface="Calibri"/>
+                <a:cs typeface="Calibri"/>
+              </a:rPr>
+              <a:t> </a:t>
+            </a:r>
+            <a:r>
+              <a:rPr sz="2800" b="1" dirty="0">
+                <a:solidFill>
+                  <a:srgbClr val="00B050"/>
+                </a:solidFill>
                 <a:latin typeface="Calibri"/>
                 <a:cs typeface="Calibri"/>
               </a:rPr>
               <a:t>rights</a:t>
             </a:r>
             <a:r>
-              <a:rPr sz="2800" spc="-40" dirty="0">
-                <a:latin typeface="Calibri"/>
-                <a:cs typeface="Calibri"/>
-              </a:rPr>
-              <a:t> </a:t>
-            </a:r>
-            <a:r>
-              <a:rPr sz="2800" dirty="0">
+              <a:rPr sz="2800" b="1" spc="-40" dirty="0">
+                <a:solidFill>
+                  <a:srgbClr val="00B050"/>
+                </a:solidFill>
+                <a:latin typeface="Calibri"/>
+                <a:cs typeface="Calibri"/>
+              </a:rPr>
+              <a:t> </a:t>
+            </a:r>
+            <a:r>
+              <a:rPr sz="2800" b="1" dirty="0">
+                <a:solidFill>
+                  <a:srgbClr val="00B050"/>
+                </a:solidFill>
                 <a:latin typeface="Calibri"/>
                 <a:cs typeface="Calibri"/>
               </a:rPr>
               <a:t>&gt;</a:t>
             </a:r>
             <a:r>
-              <a:rPr sz="2800" spc="-50" dirty="0">
-                <a:latin typeface="Calibri"/>
-                <a:cs typeface="Calibri"/>
-              </a:rPr>
-              <a:t> </a:t>
-            </a:r>
-            <a:r>
-              <a:rPr sz="2800" spc="-10" dirty="0">
+              <a:rPr sz="2800" b="1" spc="-50" dirty="0">
+                <a:solidFill>
+                  <a:srgbClr val="00B050"/>
+                </a:solidFill>
+                <a:latin typeface="Calibri"/>
+                <a:cs typeface="Calibri"/>
+              </a:rPr>
+              <a:t> </a:t>
+            </a:r>
+            <a:r>
+              <a:rPr sz="2800" b="1" spc="-10" dirty="0">
+                <a:solidFill>
+                  <a:srgbClr val="00B050"/>
+                </a:solidFill>
                 <a:latin typeface="Calibri"/>
                 <a:cs typeface="Calibri"/>
               </a:rPr>
               <a:t>entries.</a:t>
             </a:r>
-            <a:endParaRPr sz="2800" dirty="0">
+            <a:endParaRPr sz="2800" b="1" dirty="0">
+              <a:solidFill>
+                <a:srgbClr val="00B050"/>
+              </a:solidFill>
               <a:latin typeface="Calibri"/>
               <a:cs typeface="Calibri"/>
             </a:endParaRPr>
@@ -20931,10 +21039,23 @@
                 <a:latin typeface="Calibri"/>
                 <a:cs typeface="Calibri"/>
               </a:rPr>
-              <a:t>an 	</a:t>
-            </a:r>
-            <a:r>
-              <a:rPr sz="3200" dirty="0">
+              <a:t>an </a:t>
+            </a:r>
+            <a:r>
+              <a:rPr sz="3200" spc="-25" dirty="0">
+                <a:solidFill>
+                  <a:srgbClr val="FF0000"/>
+                </a:solidFill>
+                <a:latin typeface="Calibri"/>
+                <a:cs typeface="Calibri"/>
+              </a:rPr>
+              <a:t>	</a:t>
+            </a:r>
+            <a:r>
+              <a:rPr sz="3200" dirty="0">
+                <a:solidFill>
+                  <a:srgbClr val="FF0000"/>
+                </a:solidFill>
                 <a:latin typeface="Calibri"/>
                 <a:cs typeface="Calibri"/>
               </a:rPr>
@@ -20942,6 +21063,9 @@
             </a:r>
             <a:r>
               <a:rPr sz="3200" spc="130" dirty="0">
+                <a:solidFill>
+                  <a:srgbClr val="FF0000"/>
+                </a:solidFill>
                 <a:latin typeface="Calibri"/>
                 <a:cs typeface="Calibri"/>
               </a:rPr>
@@ -20949,10 +21073,20 @@
             </a:r>
             <a:r>
               <a:rPr sz="3200" dirty="0">
-                <a:latin typeface="Calibri"/>
-                <a:cs typeface="Calibri"/>
-              </a:rPr>
-              <a:t>user,</a:t>
+                <a:solidFill>
+                  <a:srgbClr val="FF0000"/>
+                </a:solidFill>
+                <a:latin typeface="Calibri"/>
+                <a:cs typeface="Calibri"/>
+              </a:rPr>
+              <a:t>user</a:t>
+            </a:r>
+            <a:r>
+              <a:rPr sz="3200" dirty="0">
+                <a:latin typeface="Calibri"/>
+                <a:cs typeface="Calibri"/>
+              </a:rPr>
+              <a:t>,</a:t>
             </a:r>
             <a:r>
               <a:rPr sz="3200" spc="125" dirty="0">
@@ -21115,7 +21249,7 @@
               </a:rPr>
               <a:t>in 	it.</a:t>
             </a:r>
-            <a:endParaRPr sz="3200">
+            <a:endParaRPr sz="3200" dirty="0">
               <a:latin typeface="Calibri"/>
               <a:cs typeface="Calibri"/>
             </a:endParaRPr>
@@ -21365,7 +21499,7 @@
               </a:rPr>
               <a:t>etc.</a:t>
             </a:r>
-            <a:endParaRPr sz="3200">
+            <a:endParaRPr sz="3200" dirty="0">
               <a:latin typeface="Calibri"/>
               <a:cs typeface="Calibri"/>
             </a:endParaRPr>
